--- a/assets/powerpoints/module-achat/B3-ce-modele-ci-celui-la.pptx
+++ b/assets/powerpoints/module-achat/B3-ce-modele-ci-celui-la.pptx
@@ -10397,13 +10397,40 @@
               </a:lnSpc>
             </a:pPr>
             <a:r>
+              <a:rPr sz="2000" b="1" i="0">
+                <a:solidFill>
+                  <a:srgbClr val="4B4F52"/>
+                </a:solidFill>
+                <a:latin typeface="Verdana"/>
+              </a:rPr>
+              <a:t>cet</a:t>
+            </a:r>
+            <a:r>
               <a:rPr sz="2000" b="0" i="0">
                 <a:solidFill>
                   <a:srgbClr val="4B4F52"/>
                 </a:solidFill>
                 <a:latin typeface="Verdana"/>
               </a:rPr>
-              <a:t>&lt;b&gt;cet&lt;/b&gt; existe précisément pour éviter la rencontre de deux voyelles : cet appareil, cet écran, cet homme. Devant une consonne, c'est &lt;b&gt;ce&lt;/b&gt; : ce modèle, ce magasin.</a:t>
+              <a:t> existe précisément pour éviter la rencontre de deux voyelles : cet appareil, cet écran, cet homme. Devant une consonne, c'est </a:t>
+            </a:r>
+            <a:r>
+              <a:rPr sz="2000" b="1" i="0">
+                <a:solidFill>
+                  <a:srgbClr val="4B4F52"/>
+                </a:solidFill>
+                <a:latin typeface="Verdana"/>
+              </a:rPr>
+              <a:t>ce</a:t>
+            </a:r>
+            <a:r>
+              <a:rPr sz="2000" b="0" i="0">
+                <a:solidFill>
+                  <a:srgbClr val="4B4F52"/>
+                </a:solidFill>
+                <a:latin typeface="Verdana"/>
+              </a:rPr>
+              <a:t> : ce modèle, ce magasin.</a:t>
             </a:r>
           </a:p>
         </p:txBody>
@@ -10750,7 +10777,25 @@
                 </a:solidFill>
                 <a:latin typeface="Verdana"/>
               </a:rPr>
-              <a:t>« celui-là », « celui de gauche », « celui qui consomme le moins ». « Celui » seul ne veut rien dire. Dans le doute, employez &lt;b&gt;-là&lt;/b&gt; : c'est toujours correct.</a:t>
+              <a:t>« celui-là », « celui de gauche », « celui qui consomme le moins ». « Celui » seul ne veut rien dire. Dans le doute, employez </a:t>
+            </a:r>
+            <a:r>
+              <a:rPr sz="2000" b="1" i="0">
+                <a:solidFill>
+                  <a:srgbClr val="4B4F52"/>
+                </a:solidFill>
+                <a:latin typeface="Verdana"/>
+              </a:rPr>
+              <a:t>-là</a:t>
+            </a:r>
+            <a:r>
+              <a:rPr sz="2000" b="0" i="0">
+                <a:solidFill>
+                  <a:srgbClr val="4B4F52"/>
+                </a:solidFill>
+                <a:latin typeface="Verdana"/>
+              </a:rPr>
+              <a:t> : c'est toujours correct.</a:t>
             </a:r>
           </a:p>
         </p:txBody>
@@ -11685,7 +11730,61 @@
                 </a:solidFill>
                 <a:latin typeface="Verdana"/>
               </a:rPr>
-              <a:t>C'est ce que fait le vendeur pour ne pas répéter le même mot. &lt;b&gt;appareil&lt;/b&gt; est général, &lt;b&gt;modèle&lt;/b&gt; désigne une version précise, &lt;b&gt;machine&lt;/b&gt; est familier. Les alterner allège beaucoup un texte.</a:t>
+              <a:t>C'est ce que fait le vendeur pour ne pas répéter le même mot. </a:t>
+            </a:r>
+            <a:r>
+              <a:rPr sz="2000" b="1" i="0">
+                <a:solidFill>
+                  <a:srgbClr val="4B4F52"/>
+                </a:solidFill>
+                <a:latin typeface="Verdana"/>
+              </a:rPr>
+              <a:t>appareil</a:t>
+            </a:r>
+            <a:r>
+              <a:rPr sz="2000" b="0" i="0">
+                <a:solidFill>
+                  <a:srgbClr val="4B4F52"/>
+                </a:solidFill>
+                <a:latin typeface="Verdana"/>
+              </a:rPr>
+              <a:t> est général, </a:t>
+            </a:r>
+            <a:r>
+              <a:rPr sz="2000" b="1" i="0">
+                <a:solidFill>
+                  <a:srgbClr val="4B4F52"/>
+                </a:solidFill>
+                <a:latin typeface="Verdana"/>
+              </a:rPr>
+              <a:t>modèle</a:t>
+            </a:r>
+            <a:r>
+              <a:rPr sz="2000" b="0" i="0">
+                <a:solidFill>
+                  <a:srgbClr val="4B4F52"/>
+                </a:solidFill>
+                <a:latin typeface="Verdana"/>
+              </a:rPr>
+              <a:t> désigne une version précise, </a:t>
+            </a:r>
+            <a:r>
+              <a:rPr sz="2000" b="1" i="0">
+                <a:solidFill>
+                  <a:srgbClr val="4B4F52"/>
+                </a:solidFill>
+                <a:latin typeface="Verdana"/>
+              </a:rPr>
+              <a:t>machine</a:t>
+            </a:r>
+            <a:r>
+              <a:rPr sz="2000" b="0" i="0">
+                <a:solidFill>
+                  <a:srgbClr val="4B4F52"/>
+                </a:solidFill>
+                <a:latin typeface="Verdana"/>
+              </a:rPr>
+              <a:t> est familier. Les alterner allège beaucoup un texte.</a:t>
             </a:r>
           </a:p>
         </p:txBody>
@@ -12234,7 +12333,43 @@
                 </a:solidFill>
                 <a:latin typeface="Verdana"/>
               </a:rPr>
-              <a:t>Soit le nom est là, et on emploie &lt;b&gt;ce&lt;/b&gt;. Soit il disparaît, et on emploie &lt;b&gt;celui&lt;/b&gt;. Jamais les deux ensemble — c'est comme dire « le il ».</a:t>
+              <a:t>Soit le nom est là, et on emploie </a:t>
+            </a:r>
+            <a:r>
+              <a:rPr sz="2000" b="1" i="0">
+                <a:solidFill>
+                  <a:srgbClr val="4B4F52"/>
+                </a:solidFill>
+                <a:latin typeface="Verdana"/>
+              </a:rPr>
+              <a:t>ce</a:t>
+            </a:r>
+            <a:r>
+              <a:rPr sz="2000" b="0" i="0">
+                <a:solidFill>
+                  <a:srgbClr val="4B4F52"/>
+                </a:solidFill>
+                <a:latin typeface="Verdana"/>
+              </a:rPr>
+              <a:t>. Soit il disparaît, et on emploie </a:t>
+            </a:r>
+            <a:r>
+              <a:rPr sz="2000" b="1" i="0">
+                <a:solidFill>
+                  <a:srgbClr val="4B4F52"/>
+                </a:solidFill>
+                <a:latin typeface="Verdana"/>
+              </a:rPr>
+              <a:t>celui</a:t>
+            </a:r>
+            <a:r>
+              <a:rPr sz="2000" b="0" i="0">
+                <a:solidFill>
+                  <a:srgbClr val="4B4F52"/>
+                </a:solidFill>
+                <a:latin typeface="Verdana"/>
+              </a:rPr>
+              <a:t>. Jamais les deux ensemble — c'est comme dire « le il ».</a:t>
             </a:r>
           </a:p>
         </p:txBody>
